--- a/course/slides/AF-TRACKF-M03/AF-TRACKF-M03-v1.pptx
+++ b/course/slides/AF-TRACKF-M03/AF-TRACKF-M03-v1.pptx
@@ -6003,7 +6003,7 @@
                 </a:solidFill>
                 <a:latin typeface="Lexend"/>
               </a:rPr>
-              <a:t>Now the gate.</a:t>
+              <a:t>It is an auto gate, which means no person has to click yes.</a:t>
             </a:r>
           </a:p>
         </p:txBody>
@@ -10760,7 +10760,7 @@
                 </a:solidFill>
                 <a:latin typeface="Lexend"/>
               </a:rPr>
-              <a:t>K00 is different.</a:t>
+              <a:t>It is called the floor, and it is forced onto every app.</a:t>
             </a:r>
           </a:p>
         </p:txBody>
@@ -11645,7 +11645,7 @@
                 </a:solidFill>
                 <a:latin typeface="Lexend"/>
               </a:rPr>
-              <a:t>Here is how it looks for Litterline.</a:t>
+              <a:t>It uses K00, the floor, like every app.</a:t>
             </a:r>
           </a:p>
         </p:txBody>
@@ -14034,7 +14034,7 @@
         </p:blipFill>
         <p:spPr>
           <a:xfrm>
-            <a:off x="609600" y="3185160"/>
+            <a:off x="609600" y="3020060"/>
             <a:ext cx="1016000" cy="1016000"/>
           </a:xfrm>
           <a:prstGeom prst="rect">
@@ -14050,7 +14050,7 @@
         </p:nvSpPr>
         <p:spPr>
           <a:xfrm>
-            <a:off x="2070100" y="3147060"/>
+            <a:off x="2070100" y="2981960"/>
             <a:ext cx="9563100" cy="619760"/>
           </a:xfrm>
           <a:prstGeom prst="rect">
@@ -14089,8 +14089,8 @@
         </p:nvSpPr>
         <p:spPr>
           <a:xfrm>
-            <a:off x="2070100" y="3931920"/>
-            <a:ext cx="9563100" cy="355600"/>
+            <a:off x="2070100" y="3766820"/>
+            <a:ext cx="9563100" cy="685800"/>
           </a:xfrm>
           <a:prstGeom prst="rect">
             <a:avLst/>
@@ -14115,7 +14115,23 @@
                 </a:solidFill>
                 <a:latin typeface="Lexend"/>
               </a:rPr>
-              <a:t>Meet Rory.</a:t>
+              <a:t>He had an idea for a booking desk for dog groomers, a bit like our sample</a:t>
+            </a:r>
+          </a:p>
+          <a:p>
+            <a:pPr algn="l">
+              <a:lnSpc>
+                <a:spcPts val="2600"/>
+              </a:lnSpc>
+            </a:pPr>
+            <a:r>
+              <a:rPr sz="2000" b="0">
+                <a:solidFill>
+                  <a:srgbClr val="756E65"/>
+                </a:solidFill>
+                <a:latin typeface="Lexend"/>
+              </a:rPr>
+              <a:t>app Trimtable, and it had just passed the Merit gate.</a:t>
             </a:r>
           </a:p>
         </p:txBody>
@@ -14926,7 +14942,7 @@
         </p:blipFill>
         <p:spPr>
           <a:xfrm>
-            <a:off x="609600" y="3185160"/>
+            <a:off x="609600" y="3020060"/>
             <a:ext cx="1016000" cy="1016000"/>
           </a:xfrm>
           <a:prstGeom prst="rect">
@@ -14942,7 +14958,7 @@
         </p:nvSpPr>
         <p:spPr>
           <a:xfrm>
-            <a:off x="2070100" y="3147060"/>
+            <a:off x="2070100" y="2981960"/>
             <a:ext cx="9563100" cy="619760"/>
           </a:xfrm>
           <a:prstGeom prst="rect">
@@ -14981,8 +14997,8 @@
         </p:nvSpPr>
         <p:spPr>
           <a:xfrm>
-            <a:off x="2070100" y="3931920"/>
-            <a:ext cx="9563100" cy="355600"/>
+            <a:off x="2070100" y="3766820"/>
+            <a:ext cx="9563100" cy="685800"/>
           </a:xfrm>
           <a:prstGeom prst="rect">
             <a:avLst/>
@@ -15007,7 +15023,23 @@
                 </a:solidFill>
                 <a:latin typeface="Lexend"/>
               </a:rPr>
-              <a:t>The first choice is remix or rebuild.</a:t>
+              <a:t>To remix means to start from an existing base app that the factory already</a:t>
+            </a:r>
+          </a:p>
+          <a:p>
+            <a:pPr algn="l">
+              <a:lnSpc>
+                <a:spcPts val="2600"/>
+              </a:lnSpc>
+            </a:pPr>
+            <a:r>
+              <a:rPr sz="2000" b="0">
+                <a:solidFill>
+                  <a:srgbClr val="756E65"/>
+                </a:solidFill>
+                <a:latin typeface="Lexend"/>
+              </a:rPr>
+              <a:t>owns, kept on a shelf of bases, and change it.</a:t>
             </a:r>
           </a:p>
         </p:txBody>
@@ -16280,7 +16312,7 @@
         </p:blipFill>
         <p:spPr>
           <a:xfrm>
-            <a:off x="609600" y="3185160"/>
+            <a:off x="609600" y="3020060"/>
             <a:ext cx="1016000" cy="1016000"/>
           </a:xfrm>
           <a:prstGeom prst="rect">
@@ -16296,7 +16328,7 @@
         </p:nvSpPr>
         <p:spPr>
           <a:xfrm>
-            <a:off x="2070100" y="3147060"/>
+            <a:off x="2070100" y="2981960"/>
             <a:ext cx="9563100" cy="619760"/>
           </a:xfrm>
           <a:prstGeom prst="rect">
@@ -16335,8 +16367,8 @@
         </p:nvSpPr>
         <p:spPr>
           <a:xfrm>
-            <a:off x="2070100" y="3931920"/>
-            <a:ext cx="9563100" cy="355600"/>
+            <a:off x="2070100" y="3766820"/>
+            <a:ext cx="9563100" cy="685800"/>
           </a:xfrm>
           <a:prstGeom prst="rect">
             <a:avLst/>
@@ -16361,7 +16393,23 @@
                 </a:solidFill>
                 <a:latin typeface="Lexend"/>
               </a:rPr>
-              <a:t>Then comes the brick list.</a:t>
+              <a:t>A brick is one reusable part, such as booking or invoices, and a kit is a</a:t>
+            </a:r>
+          </a:p>
+          <a:p>
+            <a:pPr algn="l">
+              <a:lnSpc>
+                <a:spcPts val="2600"/>
+              </a:lnSpc>
+            </a:pPr>
+            <a:r>
+              <a:rPr sz="2000" b="0">
+                <a:solidFill>
+                  <a:srgbClr val="756E65"/>
+                </a:solidFill>
+                <a:latin typeface="Lexend"/>
+              </a:rPr>
+              <a:t>named bundle of bricks that ship together.</a:t>
             </a:r>
           </a:p>
         </p:txBody>
